--- a/dist/초2/국어/대화와매체/초2_국어_대화와매체_03_바르고고운말.pptx
+++ b/dist/초2/국어/대화와매체/초2_국어_대화와매체_03_바르고고운말.pptx
@@ -120,13 +120,13 @@
   <p:extLst>
     <p:ext uri="{521415D9-36F7-43E2-AB2F-B90AF26B5E84}">
       <p14:sectionLst xmlns:p14="http://schemas.microsoft.com/office/powerpoint/2010/main">
-        <p14:section name="도입" id="{f4e5be6d-0f03-8a6d-e7bb-091129eb87eb}">
+        <p14:section name="도입" id="{65fbdb73-c5d5-eb4d-64ef-14c4a3328b20}">
           <p14:sldIdLst>
             <p14:sldId id="256"/>
             <p14:sldId id="257"/>
           </p14:sldIdLst>
         </p14:section>
-        <p14:section name="개념" id="{0a20d293-c48a-6a7f-2d75-e8e1c159cebc}">
+        <p14:section name="개념" id="{6b6d652e-2993-0306-73ef-bceab43b0851}">
           <p14:sldIdLst>
             <p14:sldId id="258"/>
             <p14:sldId id="259"/>
@@ -134,32 +134,32 @@
             <p14:sldId id="263"/>
           </p14:sldIdLst>
         </p14:section>
-        <p14:section name="연습" id="{5efbd886-78af-ff81-a7cb-6d7208d249d6}">
+        <p14:section name="연습" id="{9606ff9e-5684-cc9c-0dd6-6d65e6f353bb}">
           <p14:sldIdLst>
             <p14:sldId id="261"/>
             <p14:sldId id="262"/>
             <p14:sldId id="264"/>
           </p14:sldIdLst>
         </p14:section>
-        <p14:section name="개념" id="{0dcdb8f0-30e9-40fd-eb0d-fc32e4e8a3b4}">
+        <p14:section name="개념" id="{6f036c56-36eb-4e99-b9cf-5afd20dc8aed}">
           <p14:sldIdLst/>
         </p14:section>
-        <p14:section name="연습" id="{0960aa5a-91b8-c5c1-d5cf-f784f226c024}">
+        <p14:section name="연습" id="{9073fd55-bd8c-918c-80d4-6badbe53d53f}">
           <p14:sldIdLst/>
         </p14:section>
-        <p14:section name="확인" id="{c2efe926-fd13-64e7-e53c-fdf58b898f03}">
+        <p14:section name="확인" id="{87ae43fc-7987-6121-46f5-bccd2d5db2a8}">
           <p14:sldIdLst>
             <p14:sldId id="265"/>
             <p14:sldId id="266"/>
             <p14:sldId id="267"/>
           </p14:sldIdLst>
         </p14:section>
-        <p14:section name="정리" id="{c1b156ee-b515-33ba-bb89-4232c4f80f6e}">
+        <p14:section name="정리" id="{542cf549-467f-ecb0-50c9-33458f8fe456}">
           <p14:sldIdLst>
             <p14:sldId id="268"/>
           </p14:sldIdLst>
         </p14:section>
-        <p14:section name="보충" id="{980f7907-961d-f09f-6134-1152d6782667}">
+        <p14:section name="보충" id="{c020bfe8-3b78-e6a6-8329-d6082b0e2e74}">
           <p14:sldIdLst>
             <p14:sldId id="269"/>
           </p14:sldIdLst>
@@ -6428,12 +6428,12 @@
         </p:nvSpPr>
         <p:spPr>
           <a:xfrm>
-            <a:off x="548640" y="5349240"/>
-            <a:ext cx="11091672" cy="868680"/>
+            <a:off x="548640" y="4897120"/>
+            <a:ext cx="11091672" cy="1320800"/>
           </a:xfrm>
           <a:prstGeom prst="roundRect">
             <a:avLst>
-              <a:gd name="adj" fmla="val 12632"/>
+              <a:gd name="adj" fmla="val 8308"/>
             </a:avLst>
           </a:prstGeom>
           <a:solidFill>
@@ -6455,8 +6455,8 @@
         </p:nvSpPr>
         <p:spPr>
           <a:xfrm>
-            <a:off x="822960" y="5486400"/>
-            <a:ext cx="10543032" cy="594360"/>
+            <a:off x="822960" y="5034280"/>
+            <a:ext cx="10543032" cy="1046480"/>
           </a:xfrm>
           <a:prstGeom prst="rect">
             <a:avLst/>
@@ -6504,7 +6504,7 @@
           </p:nvPr>
         </p:nvGraphicFramePr>
         <p:xfrm>
-          <a:off x="1979676" y="2247900"/>
+          <a:off x="1979676" y="2052320"/>
           <a:ext cx="8229600" cy="914400"/>
         </p:xfrm>
         <a:graphic>
@@ -6515,7 +6515,7 @@
                 <a:gridCol w="2468880"/>
                 <a:gridCol w="5760720"/>
               </a:tblGrid>
-              <a:tr h="650240">
+              <a:tr h="629920">
                 <a:tc>
                   <a:txBody>
                     <a:bodyPr/>
@@ -6653,7 +6653,7 @@
                   </a:tcPr>
                 </a:tc>
               </a:tr>
-              <a:tr h="650240">
+              <a:tr h="629920">
                 <a:tc>
                   <a:txBody>
                     <a:bodyPr/>
@@ -6791,7 +6791,7 @@
                   </a:tcPr>
                 </a:tc>
               </a:tr>
-              <a:tr h="650240">
+              <a:tr h="629920">
                 <a:tc>
                   <a:txBody>
                     <a:bodyPr/>
@@ -7170,7 +7170,7 @@
           </p:nvPr>
         </p:nvGraphicFramePr>
         <p:xfrm>
-          <a:off x="2436876" y="2265680"/>
+          <a:off x="2436876" y="2306320"/>
           <a:ext cx="7315200" cy="914400"/>
         </p:xfrm>
         <a:graphic>
@@ -7181,7 +7181,7 @@
                 <a:gridCol w="2926080"/>
                 <a:gridCol w="4389120"/>
               </a:tblGrid>
-              <a:tr h="650240">
+              <a:tr h="629920">
                 <a:tc>
                   <a:txBody>
                     <a:bodyPr/>
@@ -7319,7 +7319,7 @@
                   </a:tcPr>
                 </a:tc>
               </a:tr>
-              <a:tr h="650240">
+              <a:tr h="629920">
                 <a:tc>
                   <a:txBody>
                     <a:bodyPr/>
@@ -7457,7 +7457,7 @@
                   </a:tcPr>
                 </a:tc>
               </a:tr>
-              <a:tr h="650240">
+              <a:tr h="629920">
                 <a:tc>
                   <a:txBody>
                     <a:bodyPr/>
@@ -7595,7 +7595,7 @@
                   </a:tcPr>
                 </a:tc>
               </a:tr>
-              <a:tr h="650240">
+              <a:tr h="629920">
                 <a:tc>
                   <a:txBody>
                     <a:bodyPr/>
